--- a/DBTUNING/ch06_인덱스설계/ch06_교안.pptx
+++ b/DBTUNING/ch06_인덱스설계/ch06_교안.pptx
@@ -543,7 +543,7 @@
           <a:lstStyle/>
           <a:p>
             <a:r>
-              <a:t>제5장은 4장에서 확인한 '인덱스가 유리한 상황'의 바로 다음 질문에 답하는 장이다. 인덱스를 만들기로 했다면 어떤 컬럼을 어떤 순서로 묶을 것인가가 남는데, 이 결정 하나가 실행계획을 통째로 바꿔 놓는다는 사실을 실측으로 보여 준다. 이 장의 모든 값은 진료비청구심사 실습 DB에서 직접 캡처한 것이라 학습자가 같은 인덱스를 만들어 그대로 재현할 수 있다. 첫 시간에 강조할 문장은 하나다. 인덱스는 만들었다고 쓰이는 것이 아니라 조회 조건과 컬럼 순서가 맞아떨어져야 비로소 쓰인다는 점이다.</a:t>
+              <a:t>제ch06은 ch05에서 확인한 '인덱스가 유리한 상황'의 바로 다음 질문에 답하는 장이다. 인덱스를 만들기로 했다면 어떤 컬럼을 어떤 순서로 묶을 것인가가 남는데, 이 결정 하나가 실행계획을 통째로 바꿔 놓는다는 사실을 실측으로 보여 준다. 이 장의 모든 값은 진료비청구심사 실습 DB에서 직접 캡처한 것이라 학습자가 같은 인덱스를 만들어 그대로 재현할 수 있다. 첫 시간에 강조할 문장은 하나다. 인덱스는 만들었다고 쓰이는 것이 아니라 조회 조건과 컬럼 순서가 맞아떨어져야 비로소 쓰인다는 점이다.</a:t>
             </a:r>
           </a:p>
         </p:txBody>
@@ -2853,7 +2853,7 @@
           <a:lstStyle/>
           <a:p>
             <a:r>
-              <a:t>첫 절은 동기 부여 구간이다. 학습자 대부분은 인덱스를 '만들면 빨라지는 것'으로 알고 오는데, 4장에서 확인한 것은 인덱스가 유리한 상황이 따로 있다는 사실까지였다. 그 다음 질문인 '어떤 컬럼을 어떤 순서로 묶을 것인가'는 아직 답하지 않았다. 이 절에서는 기법을 하나도 알려 주지 않고, 설계 결정이 왜 필요한지만 합의한다. 학습자에게 지금까지 인덱스를 어떤 기준으로 만들어 왔는지 먼저 물어보고 시작하면 이후 실측 결과가 훨씬 강하게 와닿는다.</a:t>
+              <a:t>첫 절은 동기 부여 구간이다. 학습자 대부분은 인덱스를 '만들면 빨라지는 것'으로 알고 오는데, ch05에서 확인한 것은 인덱스가 유리한 상황이 따로 있다는 사실까지였다. 그 다음 질문인 '어떤 컬럼을 어떤 순서로 묶을 것인가'는 아직 답하지 않았다. 이 절에서는 기법을 하나도 알려 주지 않고, 설계 결정이 왜 필요한지만 합의한다. 학습자에게 지금까지 인덱스를 어떤 기준으로 만들어 왔는지 먼저 물어보고 시작하면 이후 실측 결과가 훨씬 강하게 와닿는다.</a:t>
             </a:r>
           </a:p>
         </p:txBody>
@@ -3133,7 +3133,7 @@
           <a:lstStyle/>
           <a:p>
             <a:r>
-              <a:t>여기서 4장과 5장의 경계를 분명히 그어 준다. 4장은 '인덱스를 쓸 것인가 말 것인가'를 다뤘고, 5장은 '쓰기로 했다면 어떻게 만들 것인가'를 다룬다. 실무에서 성능 사고가 나는 지점은 대개 후자다. 인덱스가 아예 없어서 느린 경우보다, 인덱스는 있는데 조회 조건과 컬럼 순서가 어긋나서 쓰이지 못하는 경우가 훨씬 흔하고 발견하기도 어렵다. 이 장의 실측이 바로 그 상황을 눈으로 확인시켜 준다는 점을 예고해 두면 집중도가 올라간다.</a:t>
+              <a:t>여기서 ch05과 ch06의 경계를 분명히 그어 준다. ch05은 '인덱스를 쓸 것인가 말 것인가'를 다뤘고, ch06은 '쓰기로 했다면 어떻게 만들 것인가'를 다룬다. 실무에서 성능 사고가 나는 지점은 대개 후자다. 인덱스가 아예 없어서 느린 경우보다, 인덱스는 있는데 조회 조건과 컬럼 순서가 어긋나서 쓰이지 못하는 경우가 훨씬 흔하고 발견하기도 어렵다. 이 장의 실측이 바로 그 상황을 눈으로 확인시켜 준다는 점을 예고해 두면 집중도가 올라간다.</a:t>
             </a:r>
           </a:p>
         </p:txBody>
@@ -6500,7 +6500,7 @@
                 </a:solidFill>
                 <a:latin typeface="Malgun Gothic"/>
               </a:rPr>
-              <a:t>Oracle SQL 튜닝 과정  ·  제5장</a:t>
+              <a:t>Oracle SQL 튜닝 과정  ·  제ch06</a:t>
             </a:r>
           </a:p>
         </p:txBody>
@@ -8378,7 +8378,7 @@
                 </a:solidFill>
                 <a:latin typeface="Malgun Gothic"/>
               </a:rPr>
-              <a:t>    –  선택도가 낮을 때 효과적이라는 점은 Chapter 4에서 확인했다</a:t>
+              <a:t>    –  선택도가 낮을 때 효과적이라는 점은 ch05에서 확인했다</a:t>
             </a:r>
           </a:p>
           <a:p>
@@ -11266,7 +11266,7 @@
                 </a:solidFill>
                 <a:latin typeface="Malgun Gothic"/>
               </a:rPr>
-              <a:t>    –  Chapter 4 기준 TABLE ACCESS FULL의 Buffers는 3,090이었다</a:t>
+              <a:t>    –  ch05 기준 TABLE ACCESS FULL의 Buffers는 3,090이었다</a:t>
             </a:r>
           </a:p>
           <a:p>
@@ -12045,7 +12045,7 @@
                 </a:solidFill>
                 <a:latin typeface="Malgun Gothic"/>
               </a:rPr>
-              <a:t>•  5.1  Why — Chapter 4가 남긴 질문 · 잘못된 인덱스의 대가</a:t>
+              <a:t>•  5.1  Why — ch05가 남긴 질문 · 잘못된 인덱스의 대가</a:t>
             </a:r>
           </a:p>
           <a:p>
@@ -14021,7 +14021,7 @@
                 </a:solidFill>
                 <a:latin typeface="Consolas"/>
               </a:rPr>
-              <a:t>| 없음 (Full Scan)           | 두 컬럼 모두     |   3,090 | Chapter 3 베이스라인 |</a:t>
+              <a:t>| 없음 (Full Scan)           | 두 컬럼 모두     |   3,090 | ch03 베이스라인 |</a:t>
             </a:r>
           </a:p>
           <a:p>
@@ -14722,7 +14722,7 @@
                 </a:solidFill>
                 <a:latin typeface="Malgun Gothic"/>
               </a:rPr>
-              <a:t>•  Chapter 4가 남긴 질문</a:t>
+              <a:t>•  ch05가 남긴 질문</a:t>
             </a:r>
           </a:p>
           <a:p>
@@ -15467,7 +15467,7 @@
                 </a:solidFill>
                 <a:latin typeface="Malgun Gothic"/>
               </a:rPr>
-              <a:t>•  실습문제 10문항 — SQL튜닝_Ch05_문제.md</a:t>
+              <a:t>•  실습문제 10문항 — ch06_문제.md</a:t>
             </a:r>
           </a:p>
           <a:p>
@@ -15670,7 +15670,7 @@
                 </a:solidFill>
                 <a:latin typeface="Malgun Gothic"/>
               </a:rPr>
-              <a:t>Chapter 4가 남긴 질문</a:t>
+              <a:t>ch05가 남긴 질문</a:t>
             </a:r>
           </a:p>
         </p:txBody>
@@ -15704,7 +15704,7 @@
                 </a:solidFill>
                 <a:latin typeface="Malgun Gothic"/>
               </a:rPr>
-              <a:t>•  Chapter 4에서 확인한 것 — 인덱스가 유리한 상황이 따로 있다</a:t>
+              <a:t>•  ch05에서 확인한 것 — 인덱스가 유리한 상황이 따로 있다</a:t>
             </a:r>
           </a:p>
           <a:p>

--- a/DBTUNING/ch06_인덱스설계/ch06_교안.pptx
+++ b/DBTUNING/ch06_인덱스설계/ch06_교안.pptx
@@ -543,7 +543,7 @@
           <a:lstStyle/>
           <a:p>
             <a:r>
-              <a:t>제ch06은 ch05에서 확인한 '인덱스가 유리한 상황'의 바로 다음 질문에 답하는 장이다. 인덱스를 만들기로 했다면 어떤 컬럼을 어떤 순서로 묶을 것인가가 남는데, 이 결정 하나가 실행계획을 통째로 바꿔 놓는다는 사실을 실측으로 보여 준다. 이 장의 모든 값은 진료비청구심사 실습 DB에서 직접 캡처한 것이라 학습자가 같은 인덱스를 만들어 그대로 재현할 수 있다. 첫 시간에 강조할 문장은 하나다. 인덱스는 만들었다고 쓰이는 것이 아니라 조회 조건과 컬럼 순서가 맞아떨어져야 비로소 쓰인다는 점이다.</a:t>
+              <a:t>ch06은 ch05에서 확인한 '인덱스가 유리한 상황'의 바로 다음 질문에 답하는 장이다. 인덱스를 만들기로 했다면 어떤 컬럼을 어떤 순서로 묶을 것인가가 남는데, 이 결정 하나가 실행계획을 통째로 바꿔 놓는다는 사실을 실측으로 보여 준다. 이 장의 모든 값은 진료비청구심사 실습 DB에서 직접 캡처한 것이라 학습자가 같은 인덱스를 만들어 그대로 재현할 수 있다. 첫 시간에 강조할 문장은 하나다. 인덱스는 만들었다고 쓰이는 것이 아니라 조회 조건과 컬럼 순서가 맞아떨어져야 비로소 쓰인다는 점이다.</a:t>
             </a:r>
           </a:p>
         </p:txBody>
@@ -6500,7 +6500,7 @@
                 </a:solidFill>
                 <a:latin typeface="Malgun Gothic"/>
               </a:rPr>
-              <a:t>Oracle SQL 튜닝 과정  ·  제ch06</a:t>
+              <a:t>Oracle SQL 튜닝 과정  ·  ch06</a:t>
             </a:r>
           </a:p>
         </p:txBody>
